--- a/class/cloud_infra_mgmt/13주차_통합실습1/01_강의자료/2차시_파이프라인구축.pptx
+++ b/class/cloud_infra_mgmt/13주차_통합실습1/01_강의자료/2차시_파이프라인구축.pptx
@@ -9553,7 +9553,7 @@
               </a:lnSpc>
             </a:pPr>
             <a:r>
-              <a:rPr sz="1500" b="1">
+              <a:rPr sz="1700" b="1">
                 <a:solidFill>
                   <a:srgbClr val="0D9488"/>
                 </a:solidFill>
@@ -9562,7 +9562,7 @@
               <a:t>●  </a:t>
             </a:r>
             <a:r>
-              <a:rPr sz="1500" b="0">
+              <a:rPr sz="1700" b="0">
                 <a:solidFill>
                   <a:srgbClr val="222733"/>
                 </a:solidFill>
@@ -9578,7 +9578,7 @@
               </a:lnSpc>
             </a:pPr>
             <a:r>
-              <a:rPr sz="1500" b="1">
+              <a:rPr sz="1700" b="1">
                 <a:solidFill>
                   <a:srgbClr val="0D9488"/>
                 </a:solidFill>
@@ -9587,7 +9587,7 @@
               <a:t>●  </a:t>
             </a:r>
             <a:r>
-              <a:rPr sz="1500" b="0">
+              <a:rPr sz="1700" b="0">
                 <a:solidFill>
                   <a:srgbClr val="222733"/>
                 </a:solidFill>
@@ -9603,7 +9603,7 @@
               </a:lnSpc>
             </a:pPr>
             <a:r>
-              <a:rPr sz="1500" b="1">
+              <a:rPr sz="1700" b="1">
                 <a:solidFill>
                   <a:srgbClr val="0D9488"/>
                 </a:solidFill>
@@ -9612,7 +9612,7 @@
               <a:t>●  </a:t>
             </a:r>
             <a:r>
-              <a:rPr sz="1500" b="0">
+              <a:rPr sz="1700" b="0">
                 <a:solidFill>
                   <a:srgbClr val="222733"/>
                 </a:solidFill>

--- a/class/cloud_infra_mgmt/13주차_통합실습1/01_강의자료/2차시_파이프라인구축.pptx
+++ b/class/cloud_infra_mgmt/13주차_통합실습1/01_강의자료/2차시_파이프라인구축.pptx
@@ -5459,7 +5459,7 @@
           <a:p>
             <a:pPr>
               <a:lnSpc>
-                <a:spcPct val="115000"/>
+                <a:spcPct val="149500"/>
               </a:lnSpc>
             </a:pPr>
             <a:r>
@@ -5484,7 +5484,7 @@
           <a:p>
             <a:pPr>
               <a:lnSpc>
-                <a:spcPct val="115000"/>
+                <a:spcPct val="149500"/>
               </a:lnSpc>
             </a:pPr>
             <a:r>
@@ -5509,7 +5509,7 @@
           <a:p>
             <a:pPr>
               <a:lnSpc>
-                <a:spcPct val="115000"/>
+                <a:spcPct val="149500"/>
               </a:lnSpc>
             </a:pPr>
             <a:r>
@@ -5900,7 +5900,7 @@
           <a:p>
             <a:pPr>
               <a:lnSpc>
-                <a:spcPct val="115000"/>
+                <a:spcPct val="149500"/>
               </a:lnSpc>
             </a:pPr>
             <a:r>
@@ -5925,7 +5925,7 @@
           <a:p>
             <a:pPr>
               <a:lnSpc>
-                <a:spcPct val="115000"/>
+                <a:spcPct val="149500"/>
               </a:lnSpc>
             </a:pPr>
             <a:r>
@@ -5950,7 +5950,7 @@
           <a:p>
             <a:pPr>
               <a:lnSpc>
-                <a:spcPct val="115000"/>
+                <a:spcPct val="149500"/>
               </a:lnSpc>
             </a:pPr>
             <a:r>
@@ -5975,7 +5975,7 @@
           <a:p>
             <a:pPr>
               <a:lnSpc>
-                <a:spcPct val="115000"/>
+                <a:spcPct val="149500"/>
               </a:lnSpc>
             </a:pPr>
             <a:r>
@@ -6366,7 +6366,7 @@
           <a:p>
             <a:pPr>
               <a:lnSpc>
-                <a:spcPct val="115000"/>
+                <a:spcPct val="149500"/>
               </a:lnSpc>
             </a:pPr>
             <a:r>
@@ -6391,7 +6391,7 @@
           <a:p>
             <a:pPr>
               <a:lnSpc>
-                <a:spcPct val="115000"/>
+                <a:spcPct val="149500"/>
               </a:lnSpc>
             </a:pPr>
             <a:r>
@@ -6416,7 +6416,7 @@
           <a:p>
             <a:pPr>
               <a:lnSpc>
-                <a:spcPct val="115000"/>
+                <a:spcPct val="149500"/>
               </a:lnSpc>
             </a:pPr>
             <a:r>
@@ -7665,16 +7665,60 @@
       </p:sp>
       <p:sp>
         <p:nvSpPr>
-          <p:cNvPr id="7" name="Isosceles Triangle 6"/>
+          <p:cNvPr id="7" name="Rectangle 6"/>
           <p:cNvSpPr/>
           <p:nvPr/>
         </p:nvSpPr>
         <p:spPr>
-          <a:xfrm rot="5400000">
-            <a:off x="4423409" y="1673352"/>
-            <a:ext cx="146304" cy="146304"/>
-          </a:xfrm>
-          <a:prstGeom prst="triangle">
+          <a:xfrm>
+            <a:off x="6359651" y="1730959"/>
+            <a:ext cx="2665476" cy="31089"/>
+          </a:xfrm>
+          <a:prstGeom prst="rect">
+            <a:avLst/>
+          </a:prstGeom>
+          <a:solidFill>
+            <a:srgbClr val="14B8A6"/>
+          </a:solidFill>
+          <a:ln>
+            <a:noFill/>
+          </a:ln>
+          <a:effectLst/>
+        </p:spPr>
+        <p:style>
+          <a:lnRef idx="1">
+            <a:schemeClr val="accent1"/>
+          </a:lnRef>
+          <a:fillRef idx="3">
+            <a:schemeClr val="accent1"/>
+          </a:fillRef>
+          <a:effectRef idx="2">
+            <a:schemeClr val="accent1"/>
+          </a:effectRef>
+          <a:fontRef idx="minor">
+            <a:schemeClr val="lt1"/>
+          </a:fontRef>
+        </p:style>
+        <p:txBody>
+          <a:bodyPr rtlCol="0" anchor="ctr"/>
+          <a:lstStyle/>
+          <a:p>
+            <a:pPr algn="ctr"/>
+          </a:p>
+        </p:txBody>
+      </p:sp>
+      <p:sp>
+        <p:nvSpPr>
+          <p:cNvPr id="8" name="Oval 7"/>
+          <p:cNvSpPr/>
+          <p:nvPr/>
+        </p:nvSpPr>
+        <p:spPr>
+          <a:xfrm>
+            <a:off x="2633472" y="1481328"/>
+            <a:ext cx="530352" cy="530352"/>
+          </a:xfrm>
+          <a:prstGeom prst="ellipse">
             <a:avLst/>
           </a:prstGeom>
           <a:solidFill>
@@ -7709,139 +7753,7 @@
       </p:sp>
       <p:sp>
         <p:nvSpPr>
-          <p:cNvPr id="8" name="Rectangle 7"/>
-          <p:cNvSpPr/>
-          <p:nvPr/>
-        </p:nvSpPr>
-        <p:spPr>
-          <a:xfrm>
-            <a:off x="6359651" y="1730959"/>
-            <a:ext cx="2665476" cy="31089"/>
-          </a:xfrm>
-          <a:prstGeom prst="rect">
-            <a:avLst/>
-          </a:prstGeom>
-          <a:solidFill>
-            <a:srgbClr val="14B8A6"/>
-          </a:solidFill>
-          <a:ln>
-            <a:noFill/>
-          </a:ln>
-          <a:effectLst/>
-        </p:spPr>
-        <p:style>
-          <a:lnRef idx="1">
-            <a:schemeClr val="accent1"/>
-          </a:lnRef>
-          <a:fillRef idx="3">
-            <a:schemeClr val="accent1"/>
-          </a:fillRef>
-          <a:effectRef idx="2">
-            <a:schemeClr val="accent1"/>
-          </a:effectRef>
-          <a:fontRef idx="minor">
-            <a:schemeClr val="lt1"/>
-          </a:fontRef>
-        </p:style>
-        <p:txBody>
-          <a:bodyPr rtlCol="0" anchor="ctr"/>
-          <a:lstStyle/>
-          <a:p>
-            <a:pPr algn="ctr"/>
-          </a:p>
-        </p:txBody>
-      </p:sp>
-      <p:sp>
-        <p:nvSpPr>
-          <p:cNvPr id="9" name="Isosceles Triangle 8"/>
-          <p:cNvSpPr/>
-          <p:nvPr/>
-        </p:nvSpPr>
-        <p:spPr>
-          <a:xfrm rot="5400000">
-            <a:off x="7619238" y="1673352"/>
-            <a:ext cx="146304" cy="146304"/>
-          </a:xfrm>
-          <a:prstGeom prst="triangle">
-            <a:avLst/>
-          </a:prstGeom>
-          <a:solidFill>
-            <a:srgbClr val="0D9488"/>
-          </a:solidFill>
-          <a:ln>
-            <a:noFill/>
-          </a:ln>
-          <a:effectLst/>
-        </p:spPr>
-        <p:style>
-          <a:lnRef idx="1">
-            <a:schemeClr val="accent1"/>
-          </a:lnRef>
-          <a:fillRef idx="3">
-            <a:schemeClr val="accent1"/>
-          </a:fillRef>
-          <a:effectRef idx="2">
-            <a:schemeClr val="accent1"/>
-          </a:effectRef>
-          <a:fontRef idx="minor">
-            <a:schemeClr val="lt1"/>
-          </a:fontRef>
-        </p:style>
-        <p:txBody>
-          <a:bodyPr rtlCol="0" anchor="ctr"/>
-          <a:lstStyle/>
-          <a:p>
-            <a:pPr algn="ctr"/>
-          </a:p>
-        </p:txBody>
-      </p:sp>
-      <p:sp>
-        <p:nvSpPr>
-          <p:cNvPr id="10" name="Oval 9"/>
-          <p:cNvSpPr/>
-          <p:nvPr/>
-        </p:nvSpPr>
-        <p:spPr>
-          <a:xfrm>
-            <a:off x="2633472" y="1481328"/>
-            <a:ext cx="530352" cy="530352"/>
-          </a:xfrm>
-          <a:prstGeom prst="ellipse">
-            <a:avLst/>
-          </a:prstGeom>
-          <a:solidFill>
-            <a:srgbClr val="0D9488"/>
-          </a:solidFill>
-          <a:ln>
-            <a:noFill/>
-          </a:ln>
-          <a:effectLst/>
-        </p:spPr>
-        <p:style>
-          <a:lnRef idx="1">
-            <a:schemeClr val="accent1"/>
-          </a:lnRef>
-          <a:fillRef idx="3">
-            <a:schemeClr val="accent1"/>
-          </a:fillRef>
-          <a:effectRef idx="2">
-            <a:schemeClr val="accent1"/>
-          </a:effectRef>
-          <a:fontRef idx="minor">
-            <a:schemeClr val="lt1"/>
-          </a:fontRef>
-        </p:style>
-        <p:txBody>
-          <a:bodyPr rtlCol="0" anchor="ctr"/>
-          <a:lstStyle/>
-          <a:p>
-            <a:pPr algn="ctr"/>
-          </a:p>
-        </p:txBody>
-      </p:sp>
-      <p:sp>
-        <p:nvSpPr>
-          <p:cNvPr id="11" name="TextBox 10"/>
+          <p:cNvPr id="9" name="TextBox 8"/>
           <p:cNvSpPr txBox="1"/>
           <p:nvPr/>
         </p:nvSpPr>
@@ -7876,7 +7788,7 @@
       </p:sp>
       <p:sp>
         <p:nvSpPr>
-          <p:cNvPr id="12" name="Rounded Rectangle 11"/>
+          <p:cNvPr id="10" name="Rounded Rectangle 9"/>
           <p:cNvSpPr/>
           <p:nvPr/>
         </p:nvSpPr>
@@ -7924,7 +7836,7 @@
       </p:sp>
       <p:sp>
         <p:nvSpPr>
-          <p:cNvPr id="13" name="TextBox 12"/>
+          <p:cNvPr id="11" name="TextBox 10"/>
           <p:cNvSpPr txBox="1"/>
           <p:nvPr/>
         </p:nvSpPr>
@@ -7959,7 +7871,7 @@
       </p:sp>
       <p:sp>
         <p:nvSpPr>
-          <p:cNvPr id="14" name="TextBox 13"/>
+          <p:cNvPr id="12" name="TextBox 11"/>
           <p:cNvSpPr txBox="1"/>
           <p:nvPr/>
         </p:nvSpPr>
@@ -7998,7 +7910,7 @@
       </p:sp>
       <p:sp>
         <p:nvSpPr>
-          <p:cNvPr id="15" name="Oval 14"/>
+          <p:cNvPr id="13" name="Oval 12"/>
           <p:cNvSpPr/>
           <p:nvPr/>
         </p:nvSpPr>
@@ -8042,7 +7954,7 @@
       </p:sp>
       <p:sp>
         <p:nvSpPr>
-          <p:cNvPr id="16" name="TextBox 15"/>
+          <p:cNvPr id="14" name="TextBox 13"/>
           <p:cNvSpPr txBox="1"/>
           <p:nvPr/>
         </p:nvSpPr>
@@ -8077,7 +7989,7 @@
       </p:sp>
       <p:sp>
         <p:nvSpPr>
-          <p:cNvPr id="17" name="Rounded Rectangle 16"/>
+          <p:cNvPr id="15" name="Rounded Rectangle 14"/>
           <p:cNvSpPr/>
           <p:nvPr/>
         </p:nvSpPr>
@@ -8125,7 +8037,7 @@
       </p:sp>
       <p:sp>
         <p:nvSpPr>
-          <p:cNvPr id="18" name="TextBox 17"/>
+          <p:cNvPr id="16" name="TextBox 15"/>
           <p:cNvSpPr txBox="1"/>
           <p:nvPr/>
         </p:nvSpPr>
@@ -8160,7 +8072,7 @@
       </p:sp>
       <p:sp>
         <p:nvSpPr>
-          <p:cNvPr id="19" name="TextBox 18"/>
+          <p:cNvPr id="17" name="TextBox 16"/>
           <p:cNvSpPr txBox="1"/>
           <p:nvPr/>
         </p:nvSpPr>
@@ -8199,7 +8111,7 @@
       </p:sp>
       <p:sp>
         <p:nvSpPr>
-          <p:cNvPr id="20" name="Oval 19"/>
+          <p:cNvPr id="18" name="Oval 17"/>
           <p:cNvSpPr/>
           <p:nvPr/>
         </p:nvSpPr>
@@ -8243,7 +8155,7 @@
       </p:sp>
       <p:sp>
         <p:nvSpPr>
-          <p:cNvPr id="21" name="TextBox 20"/>
+          <p:cNvPr id="19" name="TextBox 18"/>
           <p:cNvSpPr txBox="1"/>
           <p:nvPr/>
         </p:nvSpPr>
@@ -8278,7 +8190,7 @@
       </p:sp>
       <p:sp>
         <p:nvSpPr>
-          <p:cNvPr id="22" name="Rounded Rectangle 21"/>
+          <p:cNvPr id="20" name="Rounded Rectangle 19"/>
           <p:cNvSpPr/>
           <p:nvPr/>
         </p:nvSpPr>
@@ -8326,7 +8238,7 @@
       </p:sp>
       <p:sp>
         <p:nvSpPr>
-          <p:cNvPr id="23" name="TextBox 22"/>
+          <p:cNvPr id="21" name="TextBox 20"/>
           <p:cNvSpPr txBox="1"/>
           <p:nvPr/>
         </p:nvSpPr>
@@ -8361,7 +8273,7 @@
       </p:sp>
       <p:sp>
         <p:nvSpPr>
-          <p:cNvPr id="24" name="TextBox 23"/>
+          <p:cNvPr id="22" name="TextBox 21"/>
           <p:cNvSpPr txBox="1"/>
           <p:nvPr/>
         </p:nvSpPr>
@@ -8400,7 +8312,7 @@
       </p:sp>
       <p:sp>
         <p:nvSpPr>
-          <p:cNvPr id="25" name="TextBox 24"/>
+          <p:cNvPr id="23" name="TextBox 22"/>
           <p:cNvSpPr txBox="1"/>
           <p:nvPr/>
         </p:nvSpPr>
@@ -8435,7 +8347,7 @@
       </p:sp>
       <p:sp>
         <p:nvSpPr>
-          <p:cNvPr id="26" name="TextBox 25"/>
+          <p:cNvPr id="24" name="TextBox 23"/>
           <p:cNvSpPr txBox="1"/>
           <p:nvPr/>
         </p:nvSpPr>
@@ -8470,7 +8382,7 @@
       </p:sp>
       <p:sp>
         <p:nvSpPr>
-          <p:cNvPr id="27" name="Rectangle 26"/>
+          <p:cNvPr id="25" name="Rectangle 24"/>
           <p:cNvSpPr/>
           <p:nvPr/>
         </p:nvSpPr>
@@ -8994,7 +8906,7 @@
           <a:p>
             <a:pPr>
               <a:lnSpc>
-                <a:spcPct val="115000"/>
+                <a:spcPct val="149500"/>
               </a:lnSpc>
             </a:pPr>
             <a:r>
@@ -9019,7 +8931,7 @@
           <a:p>
             <a:pPr>
               <a:lnSpc>
-                <a:spcPct val="115000"/>
+                <a:spcPct val="149500"/>
               </a:lnSpc>
             </a:pPr>
             <a:r>
@@ -9044,7 +8956,7 @@
           <a:p>
             <a:pPr>
               <a:lnSpc>
-                <a:spcPct val="115000"/>
+                <a:spcPct val="149500"/>
               </a:lnSpc>
             </a:pPr>
             <a:r>
@@ -9549,7 +9461,7 @@
           <a:p>
             <a:pPr>
               <a:lnSpc>
-                <a:spcPct val="115000"/>
+                <a:spcPct val="149500"/>
               </a:lnSpc>
             </a:pPr>
             <a:r>
@@ -9574,7 +9486,7 @@
           <a:p>
             <a:pPr>
               <a:lnSpc>
-                <a:spcPct val="115000"/>
+                <a:spcPct val="149500"/>
               </a:lnSpc>
             </a:pPr>
             <a:r>
@@ -9599,7 +9511,7 @@
           <a:p>
             <a:pPr>
               <a:lnSpc>
-                <a:spcPct val="115000"/>
+                <a:spcPct val="149500"/>
               </a:lnSpc>
             </a:pPr>
             <a:r>
@@ -10333,7 +10245,7 @@
           <a:p>
             <a:pPr>
               <a:lnSpc>
-                <a:spcPct val="115000"/>
+                <a:spcPct val="149500"/>
               </a:lnSpc>
             </a:pPr>
             <a:r>
@@ -10358,7 +10270,7 @@
           <a:p>
             <a:pPr>
               <a:lnSpc>
-                <a:spcPct val="115000"/>
+                <a:spcPct val="149500"/>
               </a:lnSpc>
             </a:pPr>
             <a:r>
@@ -10383,7 +10295,7 @@
           <a:p>
             <a:pPr>
               <a:lnSpc>
-                <a:spcPct val="115000"/>
+                <a:spcPct val="149500"/>
               </a:lnSpc>
             </a:pPr>
             <a:r>
@@ -10408,7 +10320,7 @@
           <a:p>
             <a:pPr>
               <a:lnSpc>
-                <a:spcPct val="115000"/>
+                <a:spcPct val="149500"/>
               </a:lnSpc>
             </a:pPr>
             <a:r>
@@ -10433,7 +10345,7 @@
           <a:p>
             <a:pPr>
               <a:lnSpc>
-                <a:spcPct val="115000"/>
+                <a:spcPct val="149500"/>
               </a:lnSpc>
             </a:pPr>
             <a:r>
@@ -10458,7 +10370,7 @@
           <a:p>
             <a:pPr>
               <a:lnSpc>
-                <a:spcPct val="115000"/>
+                <a:spcPct val="149500"/>
               </a:lnSpc>
             </a:pPr>
             <a:r>
@@ -10483,7 +10395,7 @@
           <a:p>
             <a:pPr>
               <a:lnSpc>
-                <a:spcPct val="115000"/>
+                <a:spcPct val="149500"/>
               </a:lnSpc>
             </a:pPr>
             <a:r>
@@ -10508,7 +10420,7 @@
           <a:p>
             <a:pPr>
               <a:lnSpc>
-                <a:spcPct val="115000"/>
+                <a:spcPct val="149500"/>
               </a:lnSpc>
             </a:pPr>
             <a:r>
@@ -10533,7 +10445,7 @@
           <a:p>
             <a:pPr>
               <a:lnSpc>
-                <a:spcPct val="115000"/>
+                <a:spcPct val="149500"/>
               </a:lnSpc>
             </a:pPr>
             <a:r>
@@ -10558,7 +10470,7 @@
           <a:p>
             <a:pPr>
               <a:lnSpc>
-                <a:spcPct val="115000"/>
+                <a:spcPct val="149500"/>
               </a:lnSpc>
             </a:pPr>
             <a:r>
@@ -10583,7 +10495,7 @@
           <a:p>
             <a:pPr>
               <a:lnSpc>
-                <a:spcPct val="115000"/>
+                <a:spcPct val="149500"/>
               </a:lnSpc>
             </a:pPr>
             <a:r>
@@ -10608,7 +10520,7 @@
           <a:p>
             <a:pPr>
               <a:lnSpc>
-                <a:spcPct val="115000"/>
+                <a:spcPct val="149500"/>
               </a:lnSpc>
             </a:pPr>
             <a:r>
@@ -10999,7 +10911,7 @@
           <a:p>
             <a:pPr>
               <a:lnSpc>
-                <a:spcPct val="115000"/>
+                <a:spcPct val="149500"/>
               </a:lnSpc>
             </a:pPr>
             <a:r>
@@ -11024,7 +10936,7 @@
           <a:p>
             <a:pPr>
               <a:lnSpc>
-                <a:spcPct val="115000"/>
+                <a:spcPct val="149500"/>
               </a:lnSpc>
             </a:pPr>
             <a:r>
@@ -11049,7 +10961,7 @@
           <a:p>
             <a:pPr>
               <a:lnSpc>
-                <a:spcPct val="115000"/>
+                <a:spcPct val="149500"/>
               </a:lnSpc>
             </a:pPr>
             <a:r>
@@ -11074,7 +10986,7 @@
           <a:p>
             <a:pPr>
               <a:lnSpc>
-                <a:spcPct val="115000"/>
+                <a:spcPct val="149500"/>
               </a:lnSpc>
             </a:pPr>
             <a:r>
@@ -11099,7 +11011,7 @@
           <a:p>
             <a:pPr>
               <a:lnSpc>
-                <a:spcPct val="115000"/>
+                <a:spcPct val="149500"/>
               </a:lnSpc>
             </a:pPr>
             <a:r>
@@ -11124,7 +11036,7 @@
           <a:p>
             <a:pPr>
               <a:lnSpc>
-                <a:spcPct val="115000"/>
+                <a:spcPct val="149500"/>
               </a:lnSpc>
             </a:pPr>
             <a:r>
@@ -11149,7 +11061,7 @@
           <a:p>
             <a:pPr>
               <a:lnSpc>
-                <a:spcPct val="115000"/>
+                <a:spcPct val="149500"/>
               </a:lnSpc>
             </a:pPr>
             <a:r>
@@ -11174,7 +11086,7 @@
           <a:p>
             <a:pPr>
               <a:lnSpc>
-                <a:spcPct val="115000"/>
+                <a:spcPct val="149500"/>
               </a:lnSpc>
             </a:pPr>
             <a:r>

--- a/class/cloud_infra_mgmt/13주차_통합실습1/01_강의자료/2차시_파이프라인구축.pptx
+++ b/class/cloud_infra_mgmt/13주차_통합실습1/01_강의자료/2차시_파이프라인구축.pptx
@@ -5095,6 +5095,8 @@
                   <a:srgbClr val="14B8A6"/>
                 </a:solidFill>
                 <a:latin typeface="맑은 고딕"/>
+                <a:ea typeface="맑은 고딕"/>
+                <a:cs typeface="맑은 고딕"/>
               </a:rPr>
               <a:t>클라우드인프라관리  ·  13주차 2차시 [VM 전용]</a:t>
             </a:r>
@@ -5130,6 +5132,8 @@
                   <a:srgbClr val="FFFFFF"/>
                 </a:solidFill>
                 <a:latin typeface="맑은 고딕"/>
+                <a:ea typeface="맑은 고딕"/>
+                <a:cs typeface="맑은 고딕"/>
               </a:rPr>
               <a:t>파이프라인 구축</a:t>
             </a:r>
@@ -5165,6 +5169,8 @@
                   <a:srgbClr val="C9D3E6"/>
                 </a:solidFill>
                 <a:latin typeface="맑은 고딕"/>
+                <a:ea typeface="맑은 고딕"/>
+                <a:cs typeface="맑은 고딕"/>
               </a:rPr>
               <a:t>Git → Jenkins(Poll SCM) → Docker Hub → K8s</a:t>
             </a:r>
@@ -5200,6 +5206,8 @@
                   <a:srgbClr val="FFFFFF"/>
                 </a:solidFill>
                 <a:latin typeface="맑은 고딕"/>
+                <a:ea typeface="맑은 고딕"/>
+                <a:cs typeface="맑은 고딕"/>
               </a:rPr>
               <a:t>영남이공대학교 김지윤교수</a:t>
             </a:r>
@@ -5359,6 +5367,8 @@
                   <a:srgbClr val="14213D"/>
                 </a:solidFill>
                 <a:latin typeface="맑은 고딕"/>
+                <a:ea typeface="맑은 고딕"/>
+                <a:cs typeface="맑은 고딕"/>
               </a:rPr>
               <a:t>02</a:t>
             </a:r>
@@ -5394,6 +5404,8 @@
                   <a:srgbClr val="14B8A6"/>
                 </a:solidFill>
                 <a:latin typeface="맑은 고딕"/>
+                <a:ea typeface="맑은 고딕"/>
+                <a:cs typeface="맑은 고딕"/>
               </a:rPr>
               <a:t>PART 2 · Jenkinsfile</a:t>
             </a:r>
@@ -5429,6 +5441,8 @@
                   <a:srgbClr val="FFFFFF"/>
                 </a:solidFill>
                 <a:latin typeface="맑은 고딕"/>
+                <a:ea typeface="맑은 고딕"/>
+                <a:cs typeface="맑은 고딕"/>
               </a:rPr>
               <a:t>Credential 등록 먼저 하기</a:t>
             </a:r>
@@ -5468,6 +5482,8 @@
                   <a:srgbClr val="0D9488"/>
                 </a:solidFill>
                 <a:latin typeface="맑은 고딕"/>
+                <a:ea typeface="맑은 고딕"/>
+                <a:cs typeface="맑은 고딕"/>
               </a:rPr>
               <a:t>●  </a:t>
             </a:r>
@@ -5477,6 +5493,8 @@
                   <a:srgbClr val="222733"/>
                 </a:solidFill>
                 <a:latin typeface="맑은 고딕"/>
+                <a:ea typeface="맑은 고딕"/>
+                <a:cs typeface="맑은 고딕"/>
               </a:rPr>
               <a:t>Jenkins 관리 → Credentials → Docker Hub 아이디·비밀번호를 'dockerhub-cred'라는 ID로 등록</a:t>
             </a:r>
@@ -5493,6 +5511,8 @@
                   <a:srgbClr val="0D9488"/>
                 </a:solidFill>
                 <a:latin typeface="맑은 고딕"/>
+                <a:ea typeface="맑은 고딕"/>
+                <a:cs typeface="맑은 고딕"/>
               </a:rPr>
               <a:t>●  </a:t>
             </a:r>
@@ -5502,6 +5522,8 @@
                   <a:srgbClr val="222733"/>
                 </a:solidFill>
                 <a:latin typeface="맑은 고딕"/>
+                <a:ea typeface="맑은 고딕"/>
+                <a:cs typeface="맑은 고딕"/>
               </a:rPr>
               <a:t>Jenkinsfile 코드 안에는 비밀번호가 절대 그대로 적히지 않음 — withCredentials가 안전하게 주입</a:t>
             </a:r>
@@ -5518,6 +5540,8 @@
                   <a:srgbClr val="0D9488"/>
                 </a:solidFill>
                 <a:latin typeface="맑은 고딕"/>
+                <a:ea typeface="맑은 고딕"/>
+                <a:cs typeface="맑은 고딕"/>
               </a:rPr>
               <a:t>●  </a:t>
             </a:r>
@@ -5527,6 +5551,8 @@
                   <a:srgbClr val="222733"/>
                 </a:solidFill>
                 <a:latin typeface="맑은 고딕"/>
+                <a:ea typeface="맑은 고딕"/>
+                <a:cs typeface="맑은 고딕"/>
               </a:rPr>
               <a:t>12주차에 배운 개념이 오늘 실제로 왜 필요했는지 확인하는 순간</a:t>
             </a:r>
@@ -5562,6 +5588,8 @@
                   <a:srgbClr val="5B6373"/>
                 </a:solidFill>
                 <a:latin typeface="맑은 고딕"/>
+                <a:ea typeface="맑은 고딕"/>
+                <a:cs typeface="맑은 고딕"/>
               </a:rPr>
               <a:t>클라우드인프라관리  ·  13주차 2차시 [VM 전용]</a:t>
             </a:r>
@@ -5597,6 +5625,8 @@
                   <a:srgbClr val="5B6373"/>
                 </a:solidFill>
                 <a:latin typeface="맑은 고딕"/>
+                <a:ea typeface="맑은 고딕"/>
+                <a:cs typeface="맑은 고딕"/>
               </a:rPr>
               <a:t>10 / 14</a:t>
             </a:r>
@@ -5800,6 +5830,8 @@
                   <a:srgbClr val="14213D"/>
                 </a:solidFill>
                 <a:latin typeface="맑은 고딕"/>
+                <a:ea typeface="맑은 고딕"/>
+                <a:cs typeface="맑은 고딕"/>
               </a:rPr>
               <a:t>03</a:t>
             </a:r>
@@ -5835,6 +5867,8 @@
                   <a:srgbClr val="14B8A6"/>
                 </a:solidFill>
                 <a:latin typeface="맑은 고딕"/>
+                <a:ea typeface="맑은 고딕"/>
+                <a:cs typeface="맑은 고딕"/>
               </a:rPr>
               <a:t>실습 안내</a:t>
             </a:r>
@@ -5870,6 +5904,8 @@
                   <a:srgbClr val="FFFFFF"/>
                 </a:solidFill>
                 <a:latin typeface="맑은 고딕"/>
+                <a:ea typeface="맑은 고딕"/>
+                <a:cs typeface="맑은 고딕"/>
               </a:rPr>
               <a:t>VM 실습 — 파이프라인 구축</a:t>
             </a:r>
@@ -5909,6 +5945,8 @@
                   <a:srgbClr val="0D9488"/>
                 </a:solidFill>
                 <a:latin typeface="맑은 고딕"/>
+                <a:ea typeface="맑은 고딕"/>
+                <a:cs typeface="맑은 고딕"/>
               </a:rPr>
               <a:t>●  </a:t>
             </a:r>
@@ -5918,6 +5956,8 @@
                   <a:srgbClr val="222733"/>
                 </a:solidFill>
                 <a:latin typeface="맑은 고딕"/>
+                <a:ea typeface="맑은 고딕"/>
+                <a:cs typeface="맑은 고딕"/>
               </a:rPr>
               <a:t>챗봇 프로젝트(app.py, Dockerfile, deployment.yaml)를 GitHub 저장소에 push</a:t>
             </a:r>
@@ -5934,6 +5974,8 @@
                   <a:srgbClr val="0D9488"/>
                 </a:solidFill>
                 <a:latin typeface="맑은 고딕"/>
+                <a:ea typeface="맑은 고딕"/>
+                <a:cs typeface="맑은 고딕"/>
               </a:rPr>
               <a:t>●  </a:t>
             </a:r>
@@ -5943,6 +5985,8 @@
                   <a:srgbClr val="222733"/>
                 </a:solidFill>
                 <a:latin typeface="맑은 고딕"/>
+                <a:ea typeface="맑은 고딕"/>
+                <a:cs typeface="맑은 고딕"/>
               </a:rPr>
               <a:t>minikube에 chatbot Deployment 최초 1회 kubectl apply로 배포</a:t>
             </a:r>
@@ -5959,6 +6003,8 @@
                   <a:srgbClr val="0D9488"/>
                 </a:solidFill>
                 <a:latin typeface="맑은 고딕"/>
+                <a:ea typeface="맑은 고딕"/>
+                <a:cs typeface="맑은 고딕"/>
               </a:rPr>
               <a:t>●  </a:t>
             </a:r>
@@ -5968,6 +6014,8 @@
                   <a:srgbClr val="222733"/>
                 </a:solidFill>
                 <a:latin typeface="맑은 고딕"/>
+                <a:ea typeface="맑은 고딕"/>
+                <a:cs typeface="맑은 고딕"/>
               </a:rPr>
               <a:t>Jenkins에 dockerhub-cred 등록 후, Checkout+Build+Push+Deploy 4단계 Jenkinsfile로 Pipeline Job 생성</a:t>
             </a:r>
@@ -5984,6 +6032,8 @@
                   <a:srgbClr val="0D9488"/>
                 </a:solidFill>
                 <a:latin typeface="맑은 고딕"/>
+                <a:ea typeface="맑은 고딕"/>
+                <a:cs typeface="맑은 고딕"/>
               </a:rPr>
               <a:t>●  </a:t>
             </a:r>
@@ -5993,6 +6043,8 @@
                   <a:srgbClr val="222733"/>
                 </a:solidFill>
                 <a:latin typeface="맑은 고딕"/>
+                <a:ea typeface="맑은 고딕"/>
+                <a:cs typeface="맑은 고딕"/>
               </a:rPr>
               <a:t>Build Now로 첫 수동 실행 → 4단계 모두 성공(초록색) 확인</a:t>
             </a:r>
@@ -6028,6 +6080,8 @@
                   <a:srgbClr val="5B6373"/>
                 </a:solidFill>
                 <a:latin typeface="맑은 고딕"/>
+                <a:ea typeface="맑은 고딕"/>
+                <a:cs typeface="맑은 고딕"/>
               </a:rPr>
               <a:t>클라우드인프라관리  ·  13주차 2차시 [VM 전용]</a:t>
             </a:r>
@@ -6063,6 +6117,8 @@
                   <a:srgbClr val="5B6373"/>
                 </a:solidFill>
                 <a:latin typeface="맑은 고딕"/>
+                <a:ea typeface="맑은 고딕"/>
+                <a:cs typeface="맑은 고딕"/>
               </a:rPr>
               <a:t>11 / 14</a:t>
             </a:r>
@@ -6266,6 +6322,8 @@
                   <a:srgbClr val="14213D"/>
                 </a:solidFill>
                 <a:latin typeface="맑은 고딕"/>
+                <a:ea typeface="맑은 고딕"/>
+                <a:cs typeface="맑은 고딕"/>
               </a:rPr>
               <a:t>03</a:t>
             </a:r>
@@ -6301,6 +6359,8 @@
                   <a:srgbClr val="14B8A6"/>
                 </a:solidFill>
                 <a:latin typeface="맑은 고딕"/>
+                <a:ea typeface="맑은 고딕"/>
+                <a:cs typeface="맑은 고딕"/>
               </a:rPr>
               <a:t>실습 안내</a:t>
             </a:r>
@@ -6336,6 +6396,8 @@
                   <a:srgbClr val="FFFFFF"/>
                 </a:solidFill>
                 <a:latin typeface="맑은 고딕"/>
+                <a:ea typeface="맑은 고딕"/>
+                <a:cs typeface="맑은 고딕"/>
               </a:rPr>
               <a:t>결과 정리 및 제출</a:t>
             </a:r>
@@ -6375,6 +6437,8 @@
                   <a:srgbClr val="0D9488"/>
                 </a:solidFill>
                 <a:latin typeface="맑은 고딕"/>
+                <a:ea typeface="맑은 고딕"/>
+                <a:cs typeface="맑은 고딕"/>
               </a:rPr>
               <a:t>●  </a:t>
             </a:r>
@@ -6384,6 +6448,8 @@
                   <a:srgbClr val="222733"/>
                 </a:solidFill>
                 <a:latin typeface="맑은 고딕"/>
+                <a:ea typeface="맑은 고딕"/>
+                <a:cs typeface="맑은 고딕"/>
               </a:rPr>
               <a:t>Stage View에서 Checkout·Build·Push·Deploy 4단계가 전부 성공한 화면 캡처</a:t>
             </a:r>
@@ -6400,6 +6466,8 @@
                   <a:srgbClr val="0D9488"/>
                 </a:solidFill>
                 <a:latin typeface="맑은 고딕"/>
+                <a:ea typeface="맑은 고딕"/>
+                <a:cs typeface="맑은 고딕"/>
               </a:rPr>
               <a:t>●  </a:t>
             </a:r>
@@ -6409,6 +6477,8 @@
                   <a:srgbClr val="222733"/>
                 </a:solidFill>
                 <a:latin typeface="맑은 고딕"/>
+                <a:ea typeface="맑은 고딕"/>
+                <a:cs typeface="맑은 고딕"/>
               </a:rPr>
               <a:t>kubectl get pods로 chatbot Pod가 새 이미지로 교체된 것 확인 캡처</a:t>
             </a:r>
@@ -6425,6 +6495,8 @@
                   <a:srgbClr val="0D9488"/>
                 </a:solidFill>
                 <a:latin typeface="맑은 고딕"/>
+                <a:ea typeface="맑은 고딕"/>
+                <a:cs typeface="맑은 고딕"/>
               </a:rPr>
               <a:t>●  </a:t>
             </a:r>
@@ -6434,6 +6506,8 @@
                   <a:srgbClr val="222733"/>
                 </a:solidFill>
                 <a:latin typeface="맑은 고딕"/>
+                <a:ea typeface="맑은 고딕"/>
+                <a:cs typeface="맑은 고딕"/>
               </a:rPr>
               <a:t>오늘 막혔던 부분이 있다면 무엇이었고 어떻게 해결했는지 간단히 기록(다음 3차시에 유용)</a:t>
             </a:r>
@@ -6469,6 +6543,8 @@
                   <a:srgbClr val="5B6373"/>
                 </a:solidFill>
                 <a:latin typeface="맑은 고딕"/>
+                <a:ea typeface="맑은 고딕"/>
+                <a:cs typeface="맑은 고딕"/>
               </a:rPr>
               <a:t>클라우드인프라관리  ·  13주차 2차시 [VM 전용]</a:t>
             </a:r>
@@ -6504,6 +6580,8 @@
                   <a:srgbClr val="5B6373"/>
                 </a:solidFill>
                 <a:latin typeface="맑은 고딕"/>
+                <a:ea typeface="맑은 고딕"/>
+                <a:cs typeface="맑은 고딕"/>
               </a:rPr>
               <a:t>12 / 14</a:t>
             </a:r>
@@ -6689,6 +6767,8 @@
                   <a:srgbClr val="FFFFFF"/>
                 </a:solidFill>
                 <a:latin typeface="맑은 고딕"/>
+                <a:ea typeface="맑은 고딕"/>
+                <a:cs typeface="맑은 고딕"/>
               </a:rPr>
               <a:t>오늘의 정리</a:t>
             </a:r>
@@ -6742,6 +6822,8 @@
                   <a:srgbClr val="14213D"/>
                 </a:solidFill>
                 <a:latin typeface="맑은 고딕"/>
+                <a:ea typeface="맑은 고딕"/>
+                <a:cs typeface="맑은 고딕"/>
               </a:rPr>
               <a:t>1</a:t>
             </a:r>
@@ -6777,6 +6859,8 @@
                   <a:srgbClr val="FFFFFF"/>
                 </a:solidFill>
                 <a:latin typeface="맑은 고딕"/>
+                <a:ea typeface="맑은 고딕"/>
+                <a:cs typeface="맑은 고딕"/>
               </a:rPr>
               <a:t>Jenkins 컨테이너에서 minikube로 직접 네트워크 연결이 안 되므로, docker exec로 minikube 내부 kubectl을 실행한다</a:t>
             </a:r>
@@ -6830,6 +6914,8 @@
                   <a:srgbClr val="14213D"/>
                 </a:solidFill>
                 <a:latin typeface="맑은 고딕"/>
+                <a:ea typeface="맑은 고딕"/>
+                <a:cs typeface="맑은 고딕"/>
               </a:rPr>
               <a:t>2</a:t>
             </a:r>
@@ -6865,6 +6951,8 @@
                   <a:srgbClr val="FFFFFF"/>
                 </a:solidFill>
                 <a:latin typeface="맑은 고딕"/>
+                <a:ea typeface="맑은 고딕"/>
+                <a:cs typeface="맑은 고딕"/>
               </a:rPr>
               <a:t>Checkout → Build → Push → Deploy 네 단계로 Git부터 K8s까지 이어지는 파이프라인을 완성했다</a:t>
             </a:r>
@@ -7006,6 +7094,8 @@
                   <a:srgbClr val="FFFFFF"/>
                 </a:solidFill>
                 <a:latin typeface="맑은 고딕"/>
+                <a:ea typeface="맑은 고딕"/>
+                <a:cs typeface="맑은 고딕"/>
               </a:rPr>
               <a:t>다음 차시 예고</a:t>
             </a:r>
@@ -7041,6 +7131,8 @@
                   <a:srgbClr val="14B8A6"/>
                 </a:solidFill>
                 <a:latin typeface="맑은 고딕"/>
+                <a:ea typeface="맑은 고딕"/>
+                <a:cs typeface="맑은 고딕"/>
               </a:rPr>
               <a:t>다음 차시 예고 — 13주차 3차시</a:t>
             </a:r>
@@ -7076,6 +7168,8 @@
                   <a:srgbClr val="FFFFFF"/>
                 </a:solidFill>
                 <a:latin typeface="맑은 고딕"/>
+                <a:ea typeface="맑은 고딕"/>
+                <a:cs typeface="맑은 고딕"/>
               </a:rPr>
               <a:t>실제로 코드를 수정하고 git push해서, Poll SCM으로 전체 파이프라인이 자동으로 끝까지 실행되는지 End-to-End 테스트하고 트러블슈팅합니다.</a:t>
             </a:r>
@@ -7217,6 +7311,8 @@
                   <a:srgbClr val="14B8A6"/>
                 </a:solidFill>
                 <a:latin typeface="맑은 고딕"/>
+                <a:ea typeface="맑은 고딕"/>
+                <a:cs typeface="맑은 고딕"/>
               </a:rPr>
               <a:t>SESSION OVERVIEW</a:t>
             </a:r>
@@ -7252,6 +7348,8 @@
                   <a:srgbClr val="FFFFFF"/>
                 </a:solidFill>
                 <a:latin typeface="맑은 고딕"/>
+                <a:ea typeface="맑은 고딕"/>
+                <a:cs typeface="맑은 고딕"/>
               </a:rPr>
               <a:t>오늘의 학습 목표</a:t>
             </a:r>
@@ -7291,6 +7389,8 @@
                   <a:srgbClr val="222733"/>
                 </a:solidFill>
                 <a:latin typeface="맑은 고딕"/>
+                <a:ea typeface="맑은 고딕"/>
+                <a:cs typeface="맑은 고딕"/>
               </a:rPr>
               <a:t>1.  Jenkinsfile에 Build·Push·Deploy 단계를 모두 작성한다</a:t>
             </a:r>
@@ -7307,6 +7407,8 @@
                   <a:srgbClr val="222733"/>
                 </a:solidFill>
                 <a:latin typeface="맑은 고딕"/>
+                <a:ea typeface="맑은 고딕"/>
+                <a:cs typeface="맑은 고딕"/>
               </a:rPr>
               <a:t>2.  Jenkins 컨테이너에서 minikube에 접속하는 특수한 방법(docker exec)을 이해한다</a:t>
             </a:r>
@@ -7323,6 +7425,8 @@
                   <a:srgbClr val="222733"/>
                 </a:solidFill>
                 <a:latin typeface="맑은 고딕"/>
+                <a:ea typeface="맑은 고딕"/>
+                <a:cs typeface="맑은 고딕"/>
               </a:rPr>
               <a:t>3.  전체 파이프라인을 Job에 연결하고 Poll SCM까지 적용한다</a:t>
             </a:r>
@@ -7358,6 +7462,8 @@
                   <a:srgbClr val="5B6373"/>
                 </a:solidFill>
                 <a:latin typeface="맑은 고딕"/>
+                <a:ea typeface="맑은 고딕"/>
+                <a:cs typeface="맑은 고딕"/>
               </a:rPr>
               <a:t>클라우드인프라관리  ·  13주차 2차시 [VM 전용]</a:t>
             </a:r>
@@ -7393,6 +7499,8 @@
                   <a:srgbClr val="5B6373"/>
                 </a:solidFill>
                 <a:latin typeface="맑은 고딕"/>
+                <a:ea typeface="맑은 고딕"/>
+                <a:cs typeface="맑은 고딕"/>
               </a:rPr>
               <a:t>02 / 14</a:t>
             </a:r>
@@ -7578,6 +7686,8 @@
                   <a:srgbClr val="14B8A6"/>
                 </a:solidFill>
                 <a:latin typeface="맑은 고딕"/>
+                <a:ea typeface="맑은 고딕"/>
+                <a:cs typeface="맑은 고딕"/>
               </a:rPr>
               <a:t>SESSION OVERVIEW</a:t>
             </a:r>
@@ -7613,6 +7723,8 @@
                   <a:srgbClr val="FFFFFF"/>
                 </a:solidFill>
                 <a:latin typeface="맑은 고딕"/>
+                <a:ea typeface="맑은 고딕"/>
+                <a:cs typeface="맑은 고딕"/>
               </a:rPr>
               <a:t>오늘의 진행 순서 (Killercoda 없음)</a:t>
             </a:r>
@@ -7780,6 +7892,8 @@
                   <a:srgbClr val="FFFFFF"/>
                 </a:solidFill>
                 <a:latin typeface="맑은 고딕"/>
+                <a:ea typeface="맑은 고딕"/>
+                <a:cs typeface="맑은 고딕"/>
               </a:rPr>
               <a:t>1</a:t>
             </a:r>
@@ -7863,6 +7977,8 @@
                   <a:srgbClr val="14213D"/>
                 </a:solidFill>
                 <a:latin typeface="맑은 고딕"/>
+                <a:ea typeface="맑은 고딕"/>
+                <a:cs typeface="맑은 고딕"/>
               </a:rPr>
               <a:t>개념 설명</a:t>
             </a:r>
@@ -7902,6 +8018,8 @@
                   <a:srgbClr val="222733"/>
                 </a:solidFill>
                 <a:latin typeface="맑은 고딕"/>
+                <a:ea typeface="맑은 고딕"/>
+                <a:cs typeface="맑은 고딕"/>
               </a:rPr>
               <a:t>Jenkinsfile 전체 구조+연결 원리</a:t>
             </a:r>
@@ -7981,6 +8099,8 @@
                   <a:srgbClr val="FFFFFF"/>
                 </a:solidFill>
                 <a:latin typeface="맑은 고딕"/>
+                <a:ea typeface="맑은 고딕"/>
+                <a:cs typeface="맑은 고딕"/>
               </a:rPr>
               <a:t>2</a:t>
             </a:r>
@@ -8064,6 +8184,8 @@
                   <a:srgbClr val="14213D"/>
                 </a:solidFill>
                 <a:latin typeface="맑은 고딕"/>
+                <a:ea typeface="맑은 고딕"/>
+                <a:cs typeface="맑은 고딕"/>
               </a:rPr>
               <a:t>VM 실습</a:t>
             </a:r>
@@ -8103,6 +8225,8 @@
                   <a:srgbClr val="222733"/>
                 </a:solidFill>
                 <a:latin typeface="맑은 고딕"/>
+                <a:ea typeface="맑은 고딕"/>
+                <a:cs typeface="맑은 고딕"/>
               </a:rPr>
               <a:t>파이프라인 구축</a:t>
             </a:r>
@@ -8182,6 +8306,8 @@
                   <a:srgbClr val="FFFFFF"/>
                 </a:solidFill>
                 <a:latin typeface="맑은 고딕"/>
+                <a:ea typeface="맑은 고딕"/>
+                <a:cs typeface="맑은 고딕"/>
               </a:rPr>
               <a:t>3</a:t>
             </a:r>
@@ -8265,6 +8391,8 @@
                   <a:srgbClr val="14213D"/>
                 </a:solidFill>
                 <a:latin typeface="맑은 고딕"/>
+                <a:ea typeface="맑은 고딕"/>
+                <a:cs typeface="맑은 고딕"/>
               </a:rPr>
               <a:t>결과 정리</a:t>
             </a:r>
@@ -8304,6 +8432,8 @@
                   <a:srgbClr val="222733"/>
                 </a:solidFill>
                 <a:latin typeface="맑은 고딕"/>
+                <a:ea typeface="맑은 고딕"/>
+                <a:cs typeface="맑은 고딕"/>
               </a:rPr>
               <a:t>제출 안내</a:t>
             </a:r>
@@ -8339,6 +8469,8 @@
                   <a:srgbClr val="5B6373"/>
                 </a:solidFill>
                 <a:latin typeface="맑은 고딕"/>
+                <a:ea typeface="맑은 고딕"/>
+                <a:cs typeface="맑은 고딕"/>
               </a:rPr>
               <a:t>클라우드인프라관리  ·  13주차 2차시 [VM 전용]</a:t>
             </a:r>
@@ -8374,6 +8506,8 @@
                   <a:srgbClr val="5B6373"/>
                 </a:solidFill>
                 <a:latin typeface="맑은 고딕"/>
+                <a:ea typeface="맑은 고딕"/>
+                <a:cs typeface="맑은 고딕"/>
               </a:rPr>
               <a:t>03 / 14</a:t>
             </a:r>
@@ -8577,6 +8711,8 @@
                   <a:srgbClr val="14213D"/>
                 </a:solidFill>
                 <a:latin typeface="맑은 고딕"/>
+                <a:ea typeface="맑은 고딕"/>
+                <a:cs typeface="맑은 고딕"/>
               </a:rPr>
               <a:t>PART 01</a:t>
             </a:r>
@@ -8612,6 +8748,8 @@
                   <a:srgbClr val="FFFFFF"/>
                 </a:solidFill>
                 <a:latin typeface="맑은 고딕"/>
+                <a:ea typeface="맑은 고딕"/>
+                <a:cs typeface="맑은 고딕"/>
               </a:rPr>
               <a:t>Jenkins에서 minikube 접속하기</a:t>
             </a:r>
@@ -8647,6 +8785,8 @@
                   <a:srgbClr val="C9D3E6"/>
                 </a:solidFill>
                 <a:latin typeface="맑은 고딕"/>
+                <a:ea typeface="맑은 고딕"/>
+                <a:cs typeface="맑은 고딕"/>
               </a:rPr>
               <a:t>겉보기엔 간단하지만, 함정이 있다</a:t>
             </a:r>
@@ -8806,6 +8946,8 @@
                   <a:srgbClr val="14213D"/>
                 </a:solidFill>
                 <a:latin typeface="맑은 고딕"/>
+                <a:ea typeface="맑은 고딕"/>
+                <a:cs typeface="맑은 고딕"/>
               </a:rPr>
               <a:t>01</a:t>
             </a:r>
@@ -8841,6 +8983,8 @@
                   <a:srgbClr val="14B8A6"/>
                 </a:solidFill>
                 <a:latin typeface="맑은 고딕"/>
+                <a:ea typeface="맑은 고딕"/>
+                <a:cs typeface="맑은 고딕"/>
               </a:rPr>
               <a:t>PART 1 · 연결 문제</a:t>
             </a:r>
@@ -8876,6 +9020,8 @@
                   <a:srgbClr val="FFFFFF"/>
                 </a:solidFill>
                 <a:latin typeface="맑은 고딕"/>
+                <a:ea typeface="맑은 고딕"/>
+                <a:cs typeface="맑은 고딕"/>
               </a:rPr>
               <a:t>왜 kubectl을 바로 실행하면 안 될까</a:t>
             </a:r>
@@ -8915,6 +9061,8 @@
                   <a:srgbClr val="0D9488"/>
                 </a:solidFill>
                 <a:latin typeface="맑은 고딕"/>
+                <a:ea typeface="맑은 고딕"/>
+                <a:cs typeface="맑은 고딕"/>
               </a:rPr>
               <a:t>●  </a:t>
             </a:r>
@@ -8924,6 +9072,8 @@
                   <a:srgbClr val="222733"/>
                 </a:solidFill>
                 <a:latin typeface="맑은 고딕"/>
+                <a:ea typeface="맑은 고딕"/>
+                <a:cs typeface="맑은 고딕"/>
               </a:rPr>
               <a:t>Jenkins는 Docker 컨테이너로 떠 있음 — minikube도 별도의 Docker 컨테이너로 떠 있음</a:t>
             </a:r>
@@ -8940,6 +9090,8 @@
                   <a:srgbClr val="0D9488"/>
                 </a:solidFill>
                 <a:latin typeface="맑은 고딕"/>
+                <a:ea typeface="맑은 고딕"/>
+                <a:cs typeface="맑은 고딕"/>
               </a:rPr>
               <a:t>●  </a:t>
             </a:r>
@@ -8949,6 +9101,8 @@
                   <a:srgbClr val="222733"/>
                 </a:solidFill>
                 <a:latin typeface="맑은 고딕"/>
+                <a:ea typeface="맑은 고딕"/>
+                <a:cs typeface="맑은 고딕"/>
               </a:rPr>
               <a:t>Jenkinsfile에서 kubectl을 곧바로 실행하면, 네트워크상 minikube 클러스터에 접속이 안 됨</a:t>
             </a:r>
@@ -8965,6 +9119,8 @@
                   <a:srgbClr val="0D9488"/>
                 </a:solidFill>
                 <a:latin typeface="맑은 고딕"/>
+                <a:ea typeface="맑은 고딕"/>
+                <a:cs typeface="맑은 고딕"/>
               </a:rPr>
               <a:t>●  </a:t>
             </a:r>
@@ -8974,6 +9130,8 @@
                   <a:srgbClr val="222733"/>
                 </a:solidFill>
                 <a:latin typeface="맑은 고딕"/>
+                <a:ea typeface="맑은 고딕"/>
+                <a:cs typeface="맑은 고딕"/>
               </a:rPr>
               <a:t>(별도 Docker 네트워크, IP 충돌 등으로 직접 연결이 막힘 — 검증된 결과)</a:t>
             </a:r>
@@ -9053,6 +9211,8 @@
                   <a:srgbClr val="FFFFFF"/>
                 </a:solidFill>
                 <a:latin typeface="맑은 고딕"/>
+                <a:ea typeface="맑은 고딕"/>
+                <a:cs typeface="맑은 고딕"/>
               </a:rPr>
               <a:t>💡  해결 방법</a:t>
             </a:r>
@@ -9088,6 +9248,8 @@
                   <a:srgbClr val="FFFFFF"/>
                 </a:solidFill>
                 <a:latin typeface="맑은 고딕"/>
+                <a:ea typeface="맑은 고딕"/>
+                <a:cs typeface="맑은 고딕"/>
               </a:rPr>
               <a:t>Jenkins에 이미 마운트된 docker.sock을 이용해, minikube 컨테이너 '안'의 kubectl을 그대로 실행</a:t>
             </a:r>
@@ -9123,6 +9285,8 @@
                   <a:srgbClr val="5B6373"/>
                 </a:solidFill>
                 <a:latin typeface="맑은 고딕"/>
+                <a:ea typeface="맑은 고딕"/>
+                <a:cs typeface="맑은 고딕"/>
               </a:rPr>
               <a:t>클라우드인프라관리  ·  13주차 2차시 [VM 전용]</a:t>
             </a:r>
@@ -9158,6 +9322,8 @@
                   <a:srgbClr val="5B6373"/>
                 </a:solidFill>
                 <a:latin typeface="맑은 고딕"/>
+                <a:ea typeface="맑은 고딕"/>
+                <a:cs typeface="맑은 고딕"/>
               </a:rPr>
               <a:t>05 / 14</a:t>
             </a:r>
@@ -9361,6 +9527,8 @@
                   <a:srgbClr val="14213D"/>
                 </a:solidFill>
                 <a:latin typeface="맑은 고딕"/>
+                <a:ea typeface="맑은 고딕"/>
+                <a:cs typeface="맑은 고딕"/>
               </a:rPr>
               <a:t>01</a:t>
             </a:r>
@@ -9396,6 +9564,8 @@
                   <a:srgbClr val="14B8A6"/>
                 </a:solidFill>
                 <a:latin typeface="맑은 고딕"/>
+                <a:ea typeface="맑은 고딕"/>
+                <a:cs typeface="맑은 고딕"/>
               </a:rPr>
               <a:t>PART 1 · 연결 문제</a:t>
             </a:r>
@@ -9431,6 +9601,8 @@
                   <a:srgbClr val="FFFFFF"/>
                 </a:solidFill>
                 <a:latin typeface="맑은 고딕"/>
+                <a:ea typeface="맑은 고딕"/>
+                <a:cs typeface="맑은 고딕"/>
               </a:rPr>
               <a:t>docker exec 우회 방식</a:t>
             </a:r>
@@ -9470,6 +9642,8 @@
                   <a:srgbClr val="0D9488"/>
                 </a:solidFill>
                 <a:latin typeface="맑은 고딕"/>
+                <a:ea typeface="맑은 고딕"/>
+                <a:cs typeface="맑은 고딕"/>
               </a:rPr>
               <a:t>●  </a:t>
             </a:r>
@@ -9479,6 +9653,8 @@
                   <a:srgbClr val="222733"/>
                 </a:solidFill>
                 <a:latin typeface="맑은 고딕"/>
+                <a:ea typeface="맑은 고딕"/>
+                <a:cs typeface="맑은 고딕"/>
               </a:rPr>
               <a:t>Jenkins가 직접 minikube에 접속하는 대신, docker exec로 minikube 컨테이너 '안에서' 명령 실행</a:t>
             </a:r>
@@ -9495,6 +9671,8 @@
                   <a:srgbClr val="0D9488"/>
                 </a:solidFill>
                 <a:latin typeface="맑은 고딕"/>
+                <a:ea typeface="맑은 고딕"/>
+                <a:cs typeface="맑은 고딕"/>
               </a:rPr>
               <a:t>●  </a:t>
             </a:r>
@@ -9504,6 +9682,8 @@
                   <a:srgbClr val="222733"/>
                 </a:solidFill>
                 <a:latin typeface="맑은 고딕"/>
+                <a:ea typeface="맑은 고딕"/>
+                <a:cs typeface="맑은 고딕"/>
               </a:rPr>
               <a:t>minikube 컨테이너 내부에는 이미 kubectl과 admin.conf(클러스터 인증 정보)가 들어있음</a:t>
             </a:r>
@@ -9520,6 +9700,8 @@
                   <a:srgbClr val="0D9488"/>
                 </a:solidFill>
                 <a:latin typeface="맑은 고딕"/>
+                <a:ea typeface="맑은 고딕"/>
+                <a:cs typeface="맑은 고딕"/>
               </a:rPr>
               <a:t>●  </a:t>
             </a:r>
@@ -9529,6 +9711,8 @@
                   <a:srgbClr val="222733"/>
                 </a:solidFill>
                 <a:latin typeface="맑은 고딕"/>
+                <a:ea typeface="맑은 고딕"/>
+                <a:cs typeface="맑은 고딕"/>
               </a:rPr>
               <a:t>이 경로를 그대로 활용하면 네트워크 연결 없이도 배포 명령을 실행할 수 있음</a:t>
             </a:r>
@@ -9564,6 +9748,8 @@
                   <a:srgbClr val="14213D"/>
                 </a:solidFill>
                 <a:latin typeface="맑은 고딕"/>
+                <a:ea typeface="맑은 고딕"/>
+                <a:cs typeface="맑은 고딕"/>
               </a:rPr>
               <a:t>11주차 docker.sock 연결의 실전 활용</a:t>
             </a:r>
@@ -9643,6 +9829,8 @@
                   <a:srgbClr val="FFFFFF"/>
                 </a:solidFill>
                 <a:latin typeface="맑은 고딕"/>
+                <a:ea typeface="맑은 고딕"/>
+                <a:cs typeface="맑은 고딕"/>
               </a:rPr>
               <a:t>Jenkins 컨테이너 → docker exec minikube ... → minikube 컨테이너 내부 kubectl 실행</a:t>
             </a:r>
@@ -9678,6 +9866,8 @@
                   <a:srgbClr val="5B6373"/>
                 </a:solidFill>
                 <a:latin typeface="맑은 고딕"/>
+                <a:ea typeface="맑은 고딕"/>
+                <a:cs typeface="맑은 고딕"/>
               </a:rPr>
               <a:t>클라우드인프라관리  ·  13주차 2차시 [VM 전용]</a:t>
             </a:r>
@@ -9713,6 +9903,8 @@
                   <a:srgbClr val="5B6373"/>
                 </a:solidFill>
                 <a:latin typeface="맑은 고딕"/>
+                <a:ea typeface="맑은 고딕"/>
+                <a:cs typeface="맑은 고딕"/>
               </a:rPr>
               <a:t>07 / 14</a:t>
             </a:r>
@@ -9916,6 +10108,8 @@
                   <a:srgbClr val="14213D"/>
                 </a:solidFill>
                 <a:latin typeface="맑은 고딕"/>
+                <a:ea typeface="맑은 고딕"/>
+                <a:cs typeface="맑은 고딕"/>
               </a:rPr>
               <a:t>PART 02</a:t>
             </a:r>
@@ -9951,6 +10145,8 @@
                   <a:srgbClr val="FFFFFF"/>
                 </a:solidFill>
                 <a:latin typeface="맑은 고딕"/>
+                <a:ea typeface="맑은 고딕"/>
+                <a:cs typeface="맑은 고딕"/>
               </a:rPr>
               <a:t>Jenkinsfile 완성하기</a:t>
             </a:r>
@@ -9986,6 +10182,8 @@
                   <a:srgbClr val="C9D3E6"/>
                 </a:solidFill>
                 <a:latin typeface="맑은 고딕"/>
+                <a:ea typeface="맑은 고딕"/>
+                <a:cs typeface="맑은 고딕"/>
               </a:rPr>
               <a:t>Checkout·Build·Push·Deploy 네 단계</a:t>
             </a:r>
@@ -10145,6 +10343,8 @@
                   <a:srgbClr val="14213D"/>
                 </a:solidFill>
                 <a:latin typeface="맑은 고딕"/>
+                <a:ea typeface="맑은 고딕"/>
+                <a:cs typeface="맑은 고딕"/>
               </a:rPr>
               <a:t>02</a:t>
             </a:r>
@@ -10180,6 +10380,8 @@
                   <a:srgbClr val="14B8A6"/>
                 </a:solidFill>
                 <a:latin typeface="맑은 고딕"/>
+                <a:ea typeface="맑은 고딕"/>
+                <a:cs typeface="맑은 고딕"/>
               </a:rPr>
               <a:t>PART 2 · Jenkinsfile</a:t>
             </a:r>
@@ -10215,6 +10417,8 @@
                   <a:srgbClr val="FFFFFF"/>
                 </a:solidFill>
                 <a:latin typeface="맑은 고딕"/>
+                <a:ea typeface="맑은 고딕"/>
+                <a:cs typeface="맑은 고딕"/>
               </a:rPr>
               <a:t>Build &amp; Push 단계 (12주차 문법 재사용)</a:t>
             </a:r>
@@ -10254,6 +10458,8 @@
                   <a:srgbClr val="0D9488"/>
                 </a:solidFill>
                 <a:latin typeface="맑은 고딕"/>
+                <a:ea typeface="맑은 고딕"/>
+                <a:cs typeface="맑은 고딕"/>
               </a:rPr>
               <a:t>●  </a:t>
             </a:r>
@@ -10263,6 +10469,8 @@
                   <a:srgbClr val="222733"/>
                 </a:solidFill>
                 <a:latin typeface="맑은 고딕"/>
+                <a:ea typeface="맑은 고딕"/>
+                <a:cs typeface="맑은 고딕"/>
               </a:rPr>
               <a:t>stage("Build") {</a:t>
             </a:r>
@@ -10279,6 +10487,8 @@
                   <a:srgbClr val="0D9488"/>
                 </a:solidFill>
                 <a:latin typeface="맑은 고딕"/>
+                <a:ea typeface="맑은 고딕"/>
+                <a:cs typeface="맑은 고딕"/>
               </a:rPr>
               <a:t>●  </a:t>
             </a:r>
@@ -10288,6 +10498,8 @@
                   <a:srgbClr val="222733"/>
                 </a:solidFill>
                 <a:latin typeface="맑은 고딕"/>
+                <a:ea typeface="맑은 고딕"/>
+                <a:cs typeface="맑은 고딕"/>
               </a:rPr>
               <a:t>  steps { sh "docker build -t {id}/chatbot:${BUILD_NUMBER} ." }</a:t>
             </a:r>
@@ -10304,6 +10516,8 @@
                   <a:srgbClr val="0D9488"/>
                 </a:solidFill>
                 <a:latin typeface="맑은 고딕"/>
+                <a:ea typeface="맑은 고딕"/>
+                <a:cs typeface="맑은 고딕"/>
               </a:rPr>
               <a:t>●  </a:t>
             </a:r>
@@ -10313,6 +10527,8 @@
                   <a:srgbClr val="222733"/>
                 </a:solidFill>
                 <a:latin typeface="맑은 고딕"/>
+                <a:ea typeface="맑은 고딕"/>
+                <a:cs typeface="맑은 고딕"/>
               </a:rPr>
               <a:t>}</a:t>
             </a:r>
@@ -10329,6 +10545,8 @@
                   <a:srgbClr val="0D9488"/>
                 </a:solidFill>
                 <a:latin typeface="맑은 고딕"/>
+                <a:ea typeface="맑은 고딕"/>
+                <a:cs typeface="맑은 고딕"/>
               </a:rPr>
               <a:t>●  </a:t>
             </a:r>
@@ -10338,6 +10556,8 @@
                   <a:srgbClr val="222733"/>
                 </a:solidFill>
                 <a:latin typeface="맑은 고딕"/>
+                <a:ea typeface="맑은 고딕"/>
+                <a:cs typeface="맑은 고딕"/>
               </a:rPr>
               <a:t>stage("Push") {</a:t>
             </a:r>
@@ -10354,6 +10574,8 @@
                   <a:srgbClr val="0D9488"/>
                 </a:solidFill>
                 <a:latin typeface="맑은 고딕"/>
+                <a:ea typeface="맑은 고딕"/>
+                <a:cs typeface="맑은 고딕"/>
               </a:rPr>
               <a:t>●  </a:t>
             </a:r>
@@ -10363,6 +10585,8 @@
                   <a:srgbClr val="222733"/>
                 </a:solidFill>
                 <a:latin typeface="맑은 고딕"/>
+                <a:ea typeface="맑은 고딕"/>
+                <a:cs typeface="맑은 고딕"/>
               </a:rPr>
               <a:t>  steps {</a:t>
             </a:r>
@@ -10379,6 +10603,8 @@
                   <a:srgbClr val="0D9488"/>
                 </a:solidFill>
                 <a:latin typeface="맑은 고딕"/>
+                <a:ea typeface="맑은 고딕"/>
+                <a:cs typeface="맑은 고딕"/>
               </a:rPr>
               <a:t>●  </a:t>
             </a:r>
@@ -10388,6 +10614,8 @@
                   <a:srgbClr val="222733"/>
                 </a:solidFill>
                 <a:latin typeface="맑은 고딕"/>
+                <a:ea typeface="맑은 고딕"/>
+                <a:cs typeface="맑은 고딕"/>
               </a:rPr>
               <a:t>    withCredentials([usernamePassword(credentialsId:"dockerhub-cred",</a:t>
             </a:r>
@@ -10404,6 +10632,8 @@
                   <a:srgbClr val="0D9488"/>
                 </a:solidFill>
                 <a:latin typeface="맑은 고딕"/>
+                <a:ea typeface="맑은 고딕"/>
+                <a:cs typeface="맑은 고딕"/>
               </a:rPr>
               <a:t>●  </a:t>
             </a:r>
@@ -10413,6 +10643,8 @@
                   <a:srgbClr val="222733"/>
                 </a:solidFill>
                 <a:latin typeface="맑은 고딕"/>
+                <a:ea typeface="맑은 고딕"/>
+                <a:cs typeface="맑은 고딕"/>
               </a:rPr>
               <a:t>      usernameVariable:"USER", passwordVariable:"PASS")]) {</a:t>
             </a:r>
@@ -10429,6 +10661,8 @@
                   <a:srgbClr val="0D9488"/>
                 </a:solidFill>
                 <a:latin typeface="맑은 고딕"/>
+                <a:ea typeface="맑은 고딕"/>
+                <a:cs typeface="맑은 고딕"/>
               </a:rPr>
               <a:t>●  </a:t>
             </a:r>
@@ -10438,6 +10672,8 @@
                   <a:srgbClr val="222733"/>
                 </a:solidFill>
                 <a:latin typeface="맑은 고딕"/>
+                <a:ea typeface="맑은 고딕"/>
+                <a:cs typeface="맑은 고딕"/>
               </a:rPr>
               <a:t>      sh "echo $PASS | docker login -u $USER --password-stdin"</a:t>
             </a:r>
@@ -10454,6 +10690,8 @@
                   <a:srgbClr val="0D9488"/>
                 </a:solidFill>
                 <a:latin typeface="맑은 고딕"/>
+                <a:ea typeface="맑은 고딕"/>
+                <a:cs typeface="맑은 고딕"/>
               </a:rPr>
               <a:t>●  </a:t>
             </a:r>
@@ -10463,6 +10701,8 @@
                   <a:srgbClr val="222733"/>
                 </a:solidFill>
                 <a:latin typeface="맑은 고딕"/>
+                <a:ea typeface="맑은 고딕"/>
+                <a:cs typeface="맑은 고딕"/>
               </a:rPr>
               <a:t>      sh "docker push {id}/chatbot:${BUILD_NUMBER}"</a:t>
             </a:r>
@@ -10479,6 +10719,8 @@
                   <a:srgbClr val="0D9488"/>
                 </a:solidFill>
                 <a:latin typeface="맑은 고딕"/>
+                <a:ea typeface="맑은 고딕"/>
+                <a:cs typeface="맑은 고딕"/>
               </a:rPr>
               <a:t>●  </a:t>
             </a:r>
@@ -10488,6 +10730,8 @@
                   <a:srgbClr val="222733"/>
                 </a:solidFill>
                 <a:latin typeface="맑은 고딕"/>
+                <a:ea typeface="맑은 고딕"/>
+                <a:cs typeface="맑은 고딕"/>
               </a:rPr>
               <a:t>    }</a:t>
             </a:r>
@@ -10504,6 +10748,8 @@
                   <a:srgbClr val="0D9488"/>
                 </a:solidFill>
                 <a:latin typeface="맑은 고딕"/>
+                <a:ea typeface="맑은 고딕"/>
+                <a:cs typeface="맑은 고딕"/>
               </a:rPr>
               <a:t>●  </a:t>
             </a:r>
@@ -10513,6 +10759,8 @@
                   <a:srgbClr val="222733"/>
                 </a:solidFill>
                 <a:latin typeface="맑은 고딕"/>
+                <a:ea typeface="맑은 고딕"/>
+                <a:cs typeface="맑은 고딕"/>
               </a:rPr>
               <a:t>  }</a:t>
             </a:r>
@@ -10529,6 +10777,8 @@
                   <a:srgbClr val="0D9488"/>
                 </a:solidFill>
                 <a:latin typeface="맑은 고딕"/>
+                <a:ea typeface="맑은 고딕"/>
+                <a:cs typeface="맑은 고딕"/>
               </a:rPr>
               <a:t>●  </a:t>
             </a:r>
@@ -10538,6 +10788,8 @@
                   <a:srgbClr val="222733"/>
                 </a:solidFill>
                 <a:latin typeface="맑은 고딕"/>
+                <a:ea typeface="맑은 고딕"/>
+                <a:cs typeface="맑은 고딕"/>
               </a:rPr>
               <a:t>}</a:t>
             </a:r>
@@ -10573,6 +10825,8 @@
                   <a:srgbClr val="5B6373"/>
                 </a:solidFill>
                 <a:latin typeface="맑은 고딕"/>
+                <a:ea typeface="맑은 고딕"/>
+                <a:cs typeface="맑은 고딕"/>
               </a:rPr>
               <a:t>클라우드인프라관리  ·  13주차 2차시 [VM 전용]</a:t>
             </a:r>
@@ -10608,6 +10862,8 @@
                   <a:srgbClr val="5B6373"/>
                 </a:solidFill>
                 <a:latin typeface="맑은 고딕"/>
+                <a:ea typeface="맑은 고딕"/>
+                <a:cs typeface="맑은 고딕"/>
               </a:rPr>
               <a:t>08 / 14</a:t>
             </a:r>
@@ -10811,6 +11067,8 @@
                   <a:srgbClr val="14213D"/>
                 </a:solidFill>
                 <a:latin typeface="맑은 고딕"/>
+                <a:ea typeface="맑은 고딕"/>
+                <a:cs typeface="맑은 고딕"/>
               </a:rPr>
               <a:t>02</a:t>
             </a:r>
@@ -10846,6 +11104,8 @@
                   <a:srgbClr val="14B8A6"/>
                 </a:solidFill>
                 <a:latin typeface="맑은 고딕"/>
+                <a:ea typeface="맑은 고딕"/>
+                <a:cs typeface="맑은 고딕"/>
               </a:rPr>
               <a:t>PART 2 · Jenkinsfile</a:t>
             </a:r>
@@ -10881,6 +11141,8 @@
                   <a:srgbClr val="FFFFFF"/>
                 </a:solidFill>
                 <a:latin typeface="맑은 고딕"/>
+                <a:ea typeface="맑은 고딕"/>
+                <a:cs typeface="맑은 고딕"/>
               </a:rPr>
               <a:t>Deploy 단계 (docker exec 방식, 검증 완료)</a:t>
             </a:r>
@@ -10920,6 +11182,8 @@
                   <a:srgbClr val="0D9488"/>
                 </a:solidFill>
                 <a:latin typeface="맑은 고딕"/>
+                <a:ea typeface="맑은 고딕"/>
+                <a:cs typeface="맑은 고딕"/>
               </a:rPr>
               <a:t>●  </a:t>
             </a:r>
@@ -10929,6 +11193,8 @@
                   <a:srgbClr val="222733"/>
                 </a:solidFill>
                 <a:latin typeface="맑은 고딕"/>
+                <a:ea typeface="맑은 고딕"/>
+                <a:cs typeface="맑은 고딕"/>
               </a:rPr>
               <a:t>stage("Deploy") {</a:t>
             </a:r>
@@ -10945,6 +11211,8 @@
                   <a:srgbClr val="0D9488"/>
                 </a:solidFill>
                 <a:latin typeface="맑은 고딕"/>
+                <a:ea typeface="맑은 고딕"/>
+                <a:cs typeface="맑은 고딕"/>
               </a:rPr>
               <a:t>●  </a:t>
             </a:r>
@@ -10954,6 +11222,8 @@
                   <a:srgbClr val="222733"/>
                 </a:solidFill>
                 <a:latin typeface="맑은 고딕"/>
+                <a:ea typeface="맑은 고딕"/>
+                <a:cs typeface="맑은 고딕"/>
               </a:rPr>
               <a:t>  steps {</a:t>
             </a:r>
@@ -10970,6 +11240,8 @@
                   <a:srgbClr val="0D9488"/>
                 </a:solidFill>
                 <a:latin typeface="맑은 고딕"/>
+                <a:ea typeface="맑은 고딕"/>
+                <a:cs typeface="맑은 고딕"/>
               </a:rPr>
               <a:t>●  </a:t>
             </a:r>
@@ -10979,6 +11251,8 @@
                   <a:srgbClr val="222733"/>
                 </a:solidFill>
                 <a:latin typeface="맑은 고딕"/>
+                <a:ea typeface="맑은 고딕"/>
+                <a:cs typeface="맑은 고딕"/>
               </a:rPr>
               <a:t>    sh 'docker exec minikube $(docker exec minikube sh -c "ls /var/lib/minikube/binaries/*/kubectl") \</a:t>
             </a:r>
@@ -10995,6 +11269,8 @@
                   <a:srgbClr val="0D9488"/>
                 </a:solidFill>
                 <a:latin typeface="맑은 고딕"/>
+                <a:ea typeface="맑은 고딕"/>
+                <a:cs typeface="맑은 고딕"/>
               </a:rPr>
               <a:t>●  </a:t>
             </a:r>
@@ -11004,6 +11280,8 @@
                   <a:srgbClr val="222733"/>
                 </a:solidFill>
                 <a:latin typeface="맑은 고딕"/>
+                <a:ea typeface="맑은 고딕"/>
+                <a:cs typeface="맑은 고딕"/>
               </a:rPr>
               <a:t>        --kubeconfig=/etc/kubernetes/admin.conf \</a:t>
             </a:r>
@@ -11020,6 +11298,8 @@
                   <a:srgbClr val="0D9488"/>
                 </a:solidFill>
                 <a:latin typeface="맑은 고딕"/>
+                <a:ea typeface="맑은 고딕"/>
+                <a:cs typeface="맑은 고딕"/>
               </a:rPr>
               <a:t>●  </a:t>
             </a:r>
@@ -11029,6 +11309,8 @@
                   <a:srgbClr val="222733"/>
                 </a:solidFill>
                 <a:latin typeface="맑은 고딕"/>
+                <a:ea typeface="맑은 고딕"/>
+                <a:cs typeface="맑은 고딕"/>
               </a:rPr>
               <a:t>        set image deployment/chatbot web={id}/chatbot:${BUILD_NUMBER}'</a:t>
             </a:r>
@@ -11045,6 +11327,8 @@
                   <a:srgbClr val="0D9488"/>
                 </a:solidFill>
                 <a:latin typeface="맑은 고딕"/>
+                <a:ea typeface="맑은 고딕"/>
+                <a:cs typeface="맑은 고딕"/>
               </a:rPr>
               <a:t>●  </a:t>
             </a:r>
@@ -11054,6 +11338,8 @@
                   <a:srgbClr val="222733"/>
                 </a:solidFill>
                 <a:latin typeface="맑은 고딕"/>
+                <a:ea typeface="맑은 고딕"/>
+                <a:cs typeface="맑은 고딕"/>
               </a:rPr>
               <a:t>    sh 'docker exec minikube ... rollout status deployment/chatbot --timeout=120s'</a:t>
             </a:r>
@@ -11070,6 +11356,8 @@
                   <a:srgbClr val="0D9488"/>
                 </a:solidFill>
                 <a:latin typeface="맑은 고딕"/>
+                <a:ea typeface="맑은 고딕"/>
+                <a:cs typeface="맑은 고딕"/>
               </a:rPr>
               <a:t>●  </a:t>
             </a:r>
@@ -11079,6 +11367,8 @@
                   <a:srgbClr val="222733"/>
                 </a:solidFill>
                 <a:latin typeface="맑은 고딕"/>
+                <a:ea typeface="맑은 고딕"/>
+                <a:cs typeface="맑은 고딕"/>
               </a:rPr>
               <a:t>  }</a:t>
             </a:r>
@@ -11095,6 +11385,8 @@
                   <a:srgbClr val="0D9488"/>
                 </a:solidFill>
                 <a:latin typeface="맑은 고딕"/>
+                <a:ea typeface="맑은 고딕"/>
+                <a:cs typeface="맑은 고딕"/>
               </a:rPr>
               <a:t>●  </a:t>
             </a:r>
@@ -11104,6 +11396,8 @@
                   <a:srgbClr val="222733"/>
                 </a:solidFill>
                 <a:latin typeface="맑은 고딕"/>
+                <a:ea typeface="맑은 고딕"/>
+                <a:cs typeface="맑은 고딕"/>
               </a:rPr>
               <a:t>}</a:t>
             </a:r>
@@ -11139,6 +11433,8 @@
                   <a:srgbClr val="5B6373"/>
                 </a:solidFill>
                 <a:latin typeface="맑은 고딕"/>
+                <a:ea typeface="맑은 고딕"/>
+                <a:cs typeface="맑은 고딕"/>
               </a:rPr>
               <a:t>클라우드인프라관리  ·  13주차 2차시 [VM 전용]</a:t>
             </a:r>
@@ -11174,6 +11470,8 @@
                   <a:srgbClr val="5B6373"/>
                 </a:solidFill>
                 <a:latin typeface="맑은 고딕"/>
+                <a:ea typeface="맑은 고딕"/>
+                <a:cs typeface="맑은 고딕"/>
               </a:rPr>
               <a:t>09 / 14</a:t>
             </a:r>
